--- a/docs/Spec_Driven_Development.pptx
+++ b/docs/Spec_Driven_Development.pptx
@@ -6286,7 +6286,7 @@
         </p:blipFill>
         <p:spPr>
           <a:xfrm>
-            <a:off x="5303520" y="1371600"/>
+            <a:off x="4846322" y="1143000"/>
             <a:ext cx="548640" cy="548640"/>
           </a:xfrm>
           <a:prstGeom prst="rect">
@@ -6302,7 +6302,7 @@
         </p:nvSpPr>
         <p:spPr>
           <a:xfrm>
-            <a:off x="6035040" y="1463040"/>
+            <a:off x="5786102" y="1154799"/>
             <a:ext cx="2011680" cy="457200"/>
           </a:xfrm>
           <a:prstGeom prst="rect">
@@ -6327,7 +6327,7 @@
         </p:nvSpPr>
         <p:spPr>
           <a:xfrm>
-            <a:off x="6126480" y="1508760"/>
+            <a:off x="6114681" y="1176184"/>
             <a:ext cx="1828800" cy="365760"/>
           </a:xfrm>
           <a:prstGeom prst="rect">
@@ -6365,9 +6365,9 @@
           <p:nvPr/>
         </p:nvSpPr>
         <p:spPr>
-          <a:xfrm>
-            <a:off x="6583680" y="2377440"/>
-            <a:ext cx="0" cy="365760"/>
+          <a:xfrm flipH="1">
+            <a:off x="6701666" y="1600200"/>
+            <a:ext cx="5899" cy="735945"/>
           </a:xfrm>
           <a:prstGeom prst="line">
             <a:avLst/>
@@ -6390,8 +6390,8 @@
         </p:nvSpPr>
         <p:spPr>
           <a:xfrm>
-            <a:off x="6126480" y="2834640"/>
-            <a:ext cx="914400" cy="548640"/>
+            <a:off x="5993753" y="2377440"/>
+            <a:ext cx="1275727" cy="548640"/>
           </a:xfrm>
           <a:prstGeom prst="rect">
             <a:avLst/>
@@ -6415,7 +6415,7 @@
         </p:nvSpPr>
         <p:spPr>
           <a:xfrm>
-            <a:off x="6126480" y="2880360"/>
+            <a:off x="6334742" y="2427584"/>
             <a:ext cx="914400" cy="457200"/>
           </a:xfrm>
           <a:prstGeom prst="rect">
@@ -6465,8 +6465,8 @@
         </p:nvSpPr>
         <p:spPr>
           <a:xfrm>
-            <a:off x="7040880" y="2834640"/>
-            <a:ext cx="0" cy="365760"/>
+            <a:off x="7040880" y="2926080"/>
+            <a:ext cx="0" cy="777240"/>
           </a:xfrm>
           <a:prstGeom prst="line">
             <a:avLst/>
@@ -6489,7 +6489,7 @@
         </p:nvSpPr>
         <p:spPr>
           <a:xfrm>
-            <a:off x="6583680" y="3291840"/>
+            <a:off x="6949440" y="3726180"/>
             <a:ext cx="914400" cy="548640"/>
           </a:xfrm>
           <a:prstGeom prst="rect">
@@ -6514,7 +6514,7 @@
         </p:nvSpPr>
         <p:spPr>
           <a:xfrm>
-            <a:off x="6583680" y="3337560"/>
+            <a:off x="6949440" y="3731342"/>
             <a:ext cx="914400" cy="457200"/>
           </a:xfrm>
           <a:prstGeom prst="rect">
@@ -6578,8 +6578,8 @@
         </p:nvSpPr>
         <p:spPr>
           <a:xfrm>
-            <a:off x="6126480" y="3291840"/>
-            <a:ext cx="0" cy="365760"/>
+            <a:off x="6331791" y="2934928"/>
+            <a:ext cx="1" cy="768392"/>
           </a:xfrm>
           <a:prstGeom prst="line">
             <a:avLst/>
